--- a/docs/ecostats_lectures/lecture_13/13_01_lecture_powerpoint.pptx
+++ b/docs/ecostats_lectures/lecture_13/13_01_lecture_powerpoint.pptx
@@ -4379,8 +4379,8 @@
                           <m:d>
                             <m:dPr>
                               <m:begChr m:val="("/>
+                              <m:sepChr m:val=""/>
                               <m:endChr m:val=")"/>
-                              <m:sepChr m:val=""/>
                               <m:grow/>
                             </m:dPr>
                             <m:e>
@@ -4650,8 +4650,8 @@
                           <m:d>
                             <m:dPr>
                               <m:begChr m:val="("/>
+                              <m:sepChr m:val=""/>
                               <m:endChr m:val=")"/>
-                              <m:sepChr m:val=""/>
                               <m:grow/>
                             </m:dPr>
                             <m:e>
@@ -4744,8 +4744,8 @@
                         <m:d>
                           <m:dPr>
                             <m:begChr m:val="("/>
+                            <m:sepChr m:val=""/>
                             <m:endChr m:val=")"/>
-                            <m:sepChr m:val=""/>
                             <m:grow/>
                           </m:dPr>
                           <m:e>
@@ -4953,8 +4953,8 @@
                           <m:d>
                             <m:dPr>
                               <m:begChr m:val="("/>
+                              <m:sepChr m:val=""/>
                               <m:endChr m:val=")"/>
-                              <m:sepChr m:val=""/>
                               <m:grow/>
                             </m:dPr>
                             <m:e>

--- a/docs/ecostats_lectures/lecture_13/13_01_lecture_powerpoint.pptx
+++ b/docs/ecostats_lectures/lecture_13/13_01_lecture_powerpoint.pptx
@@ -3320,7 +3320,7 @@
             </a:pPr>
             <a:r>
               <a:rPr/>
-              <a:t>Lecture 13 - Multifactor ANOVA</a:t>
+              <a:t>Lecture 13 - Nested ANOVA</a:t>
             </a:r>
           </a:p>
         </p:txBody>
